--- a/examples/E2/ejemplo-biblioya-e2-presentacion.pptx
+++ b/examples/E2/ejemplo-biblioya-e2-presentacion.pptx
@@ -1508,7 +1508,7 @@
                 <a:ea typeface="Calibri" pitchFamily="34" charset="-122"/>
                 <a:cs typeface="Calibri" pitchFamily="34" charset="-120"/>
               </a:rPr>
-              <a:t>20 de octubre de 2026</a:t>
+              <a:t>23 de octubre de 2026</a:t>
             </a:r>
             <a:endParaRPr lang="en-US" sz="1800" dirty="0"/>
           </a:p>
